--- a/AI_Agent_龍蝦解剖學.pptx
+++ b/AI_Agent_龍蝦解剖學.pptx
@@ -5211,7 +5211,7 @@
               </a:defRPr>
             </a:pPr>
             <a:r>
-              <a:t>🥚 繁殖 = 多代理協作</a:t>
+              <a:t>🥚 繁殖 = 多 Agent 協作</a:t>
             </a:r>
           </a:p>
         </p:txBody>
